--- a/docs/pitch-deck-draft-Trexure.pptx
+++ b/docs/pitch-deck-draft-Trexure.pptx
@@ -4274,7 +4274,7 @@
         <p:spPr>
           <a:xfrm>
             <a:off x="640080" y="548640"/>
-            <a:ext cx="7863840" cy="914400"/>
+            <a:ext cx="7863840" cy="1280160"/>
           </a:xfrm>
           <a:prstGeom prst="rect">
             <a:avLst/>
@@ -4282,13 +4282,13 @@
           <a:noFill/>
         </p:spPr>
         <p:txBody>
-          <a:bodyPr wrap="none">
+          <a:bodyPr wrap="square">
             <a:spAutoFit/>
           </a:bodyPr>
           <a:lstStyle/>
           <a:p>
             <a:pPr>
-              <a:defRPr sz="3600" b="1"/>
+              <a:defRPr sz="3200" b="1"/>
             </a:pPr>
             <a:r>
               <a:t>Public by default. Useless to finance.</a:t>
